--- a/NeuralNodes - AI Builder Cup Submission.pptx
+++ b/NeuralNodes - AI Builder Cup Submission.pptx
@@ -7113,7 +7113,7 @@
                 <a:cs typeface="Google Sans Flex"/>
                 <a:sym typeface="Google Sans Flex"/>
               </a:rPr>
-              <a:t>Problem Statement: Building proposals are checked against fixed rules, never against what they do to the airflow and heat of the blocks around them. EcoZone AI previews that climate impact before a permit. Theme: Sustainability &amp; Social Impact.</a:t>
+              <a:t>Problem Statement: Cities have no quick way to decide where trees, shade, depaving and cool roofs would cool the people who wait outdoors, or to stop new buildings breaking the breeze and green that cool a street. Theme: Sustainability &amp; Social Impact.</a:t>
             </a:r>
             <a:endParaRPr sz="1800">
               <a:latin typeface="Google Sans Flex"/>

--- a/NeuralNodes - AI Builder Cup Submission.pptx
+++ b/NeuralNodes - AI Builder Cup Submission.pptx
@@ -7085,7 +7085,7 @@
                 <a:cs typeface="Google Sans Flex"/>
                 <a:sym typeface="Google Sans Flex"/>
               </a:rPr>
-              <a:t>Team leader name: </a:t>
+              <a:t>Team leader name: Ankita Sharma</a:t>
             </a:r>
             <a:endParaRPr sz="1800">
               <a:latin typeface="Google Sans Flex"/>
